--- a/документация/Презентация My Diary.pptx
+++ b/документация/Презентация My Diary.pptx
@@ -9114,15 +9114,14 @@
         </p:nvPicPr>
         <p:blipFill>
           <a:blip r:embed="rId3"/>
-          <a:srcRect/>
           <a:stretch>
             <a:fillRect/>
           </a:stretch>
         </p:blipFill>
         <p:spPr bwMode="auto">
           <a:xfrm>
-            <a:off x="487674" y="5006714"/>
-            <a:ext cx="5876158" cy="1475491"/>
+            <a:off x="487674" y="5049330"/>
+            <a:ext cx="5876158" cy="1390258"/>
           </a:xfrm>
           <a:prstGeom prst="rect">
             <a:avLst/>
